--- a/Slides/Semana 7/semana_7_slides.pptx
+++ b/Slides/Semana 7/semana_7_slides.pptx
@@ -20,10 +20,9 @@
     <p:sldId id="268" r:id="rId14"/>
     <p:sldId id="269" r:id="rId15"/>
     <p:sldId id="270" r:id="rId16"/>
-    <p:sldId id="271" r:id="rId17"/>
   </p:sldIdLst>
   <p:notesMasterIdLst>
-    <p:notesMasterId r:id="rId18"/>
+    <p:notesMasterId r:id="rId17"/>
   </p:notesMasterIdLst>
   <p:sldSz cx="12192000" cy="6858000"/>
   <p:notesSz cx="6858000" cy="12192000"/>
@@ -517,7 +516,7 @@
           <a:p>
             <a:r>
               <a:rPr lang="en-US" dirty="0"/>
-              <a:t>Notas: Abertura da mini aula (20 min). Unidade II, entre a CF2 (Sem 5) e a CF3 (Sem 8). Mensagem central: nesta semana o material ganha PROFUNDIDADE. Nas Semanas 5-6 o Albedo passou de cor plana a imagem real; agora o Normal Map simula relevo e o Roughness varia dentro da mesma superfície — sem adicionar um único polígono. Saída da semana: o primeiro material PBR COMPLETO (Albedo + Metallic + Roughness + Normal). Não é tutorial de cliques: é entender por que a luz "acredita" em uma superfície que não existe.</a:t>
+              <a:t>Notas: Abertura da mini aula (20 min). Unidade II, entre a CF2 (Sem 5) e a CF3 (Sem 8). Mensagem central: nesta semana o material ganha PROFUNDIDADE. Nas Semanas 5-6 o Albedo passou de cor plana a imagem real; agora o Normal Map simula relevo e o Roughness varia dentro da mesma superfície — sem adicionar um único polígono. Saída da semana: o primeiro material PBR COMPLETO (Albedo + Metallic + Roughness + Normal). O Subsurface Scattering (SSS) NÃO é abordado nesta semana — foi movido para a Semana 8, junto ao sistema de camadas do 3D Coat, para não sobrecarregar esta mini-aula com um quinto conceito novo. Não é tutorial de cliques: é entender por que a luz "acredita" em uma superfície que não existe.</a:t>
             </a:r>
             <a:endParaRPr lang="en-US" dirty="0"/>
           </a:p>
@@ -698,7 +697,7 @@
           <a:p>
             <a:r>
               <a:rPr lang="en-US" dirty="0"/>
-              <a:t>Notas: O SSS entra só para completar o vocabulário do Principled BSDF. No Principled: parâmetro Subsurface de 0 a 1; valores 0.05–0.15 já produzem efeito visível. Para o kit da maioria, o valor correto é 0. Exceção: elementos orgânicos (vela, planta, tecido). Se o tempo apertar, cobrir em 2 minutos: "existe esse parâmetro, use em materiais orgânicos".</a:t>
+              <a:t>Notas: Este é o conjunto mínimo de um material de jogo profissional — o marco da semana. Reforçar o Metallic quase binário: em PBR físico não há meio-termo. Ferrugem é dielétrico (Metallic 0) com a cor do ferrugem no Albedo, não Metallic intermediário. Amarrar ao Projeto Integrador: cada material do kit precisa dos quatro canais coerentes com o tema.</a:t>
             </a:r>
             <a:endParaRPr lang="en-US" dirty="0"/>
           </a:p>
@@ -786,7 +785,7 @@
           <a:p>
             <a:r>
               <a:rPr lang="en-US" dirty="0"/>
-              <a:t>Notas: Este é o conjunto mínimo de um material de jogo profissional — o marco da semana. Reforçar o Metallic quase binário: em PBR físico não há meio-termo. Ferrugem é dielétrico (Metallic 0) com a cor do ferrugem no Albedo, não Metallic intermediário. Amarrar ao Projeto Integrador: cada material do kit precisa dos quatro canais coerentes com o tema.</a:t>
+              <a:t>Notas: Os três erros mais frequentes da semana, alinhados ao bloco de dificuldades do plano. Circular no estúdio caçando exatamente estes padrões. Para o canal errado: verificar o fio ROXO chegando à entrada Normal (abaixo de Roughness), vindo do Bump — nunca o fio amarelo do Noise direto. Para a escala: sugerir Texture Coordinate em Object para o Scale corresponder ao tamanho real do asset.</a:t>
             </a:r>
             <a:endParaRPr lang="en-US" dirty="0"/>
           </a:p>
@@ -874,7 +873,7 @@
           <a:p>
             <a:r>
               <a:rPr lang="en-US" dirty="0"/>
-              <a:t>Notas: Os três erros mais frequentes da semana, alinhados ao bloco de dificuldades do plano. Circular no estúdio caçando exatamente estes padrões. Para o canal errado: verificar o fio ROXO chegando à entrada Normal (abaixo de Roughness), vindo do Bump — nunca o fio amarelo do Noise direto. Para a escala: sugerir Texture Coordinate em Object para o Scale corresponder ao tamanho real do asset.</a:t>
+              <a:t>Notas: Amarrar a mini aula. Cada item retorna na demonstração e no estúdio. Não reler tudo — apontar a conexão com a demo. Lembrar: hoje é crítica INFORMAL; o foco é ler profundidade e coerência do material no trabalho dos colegas. Na Semana 8 (CF FORMAL) o mesmo material vem no 3D Coat, e é lá que o Subsurface Scattering aparece como canal do sistema de camadas.</a:t>
             </a:r>
             <a:endParaRPr lang="en-US" dirty="0"/>
           </a:p>
@@ -962,7 +961,7 @@
           <a:p>
             <a:r>
               <a:rPr lang="en-US" dirty="0"/>
-              <a:t>Notas: Amarrar a mini aula. Cada item retorna na demonstração e no estúdio. Não reler tudo — apontar a conexão com a demo. Lembrar: hoje é crítica INFORMAL; o foco é ler profundidade e coerência do material no trabalho dos colegas. Na Semana 8 (CF FORMAL) o mesmo material vem no 3D Coat.</a:t>
+              <a:t>Notas: Consigna do estúdio. Dois blocos: quem falta terminar o Albedo do Asset 02 fecha isso primeiro (Bloco A, ~15 min); toda a turma adiciona Normal e Roughness (Bloco B). Nomenclatura: [Nome]_Asset01_PBR_S07.blend. Capturar screenshot do node tree + render comparativo antes/depois do Normal Map. Organizar em frames (Ctrl+J) é equivalente a organizar camadas no Krita.</a:t>
             </a:r>
             <a:endParaRPr lang="en-US" dirty="0"/>
           </a:p>
@@ -1050,95 +1049,7 @@
           <a:p>
             <a:r>
               <a:rPr lang="en-US" dirty="0"/>
-              <a:t>Notas: Consigna do estúdio. Dois blocos: quem falta terminar o Albedo do Asset 02 fecha isso primeiro (Bloco A, ~15 min); toda a turma adiciona Normal e Roughness (Bloco B). Nomenclatura: [Nome]_Asset01_PBR_S07.blend. Capturar screenshot do node tree + render comparativo antes/depois do Normal Map. Organizar em frames (Ctrl+J) é equivalente a organizar camadas no Krita.</a:t>
-            </a:r>
-            <a:endParaRPr lang="en-US" dirty="0"/>
-          </a:p>
-        </p:txBody>
-      </p:sp>
-      <p:sp>
-        <p:nvSpPr>
-          <p:cNvPr id="4" name="Slide Number Placeholder 3"/>
-          <p:cNvSpPr>
-            <a:spLocks noGrp="1"/>
-          </p:cNvSpPr>
-          <p:nvPr>
-            <p:ph type="sldNum" sz="quarter" idx="10"/>
-          </p:nvPr>
-        </p:nvSpPr>
-        <p:spPr/>
-        <p:txBody>
-          <a:bodyPr/>
-          <a:lstStyle/>
-          <a:p>
-            <a:fld id="{F7021451-1387-4CA6-816F-3879F97B5CBC}" type="slidenum">
-              <a:rPr lang="en-US"/>
-              <a:t>15</a:t>
-            </a:fld>
-            <a:endParaRPr lang="en-US"/>
-          </a:p>
-        </p:txBody>
-      </p:sp>
-    </p:spTree>
-    <p:extLst>
-      <p:ext uri="{BB962C8B-B14F-4D97-AF65-F5344CB8AC3E}">
-        <p14:creationId xmlns:p14="http://schemas.microsoft.com/office/powerpoint/2010/main" val="1024086991"/>
-      </p:ext>
-    </p:extLst>
-  </p:cSld>
-  <p:clrMapOvr>
-    <a:masterClrMapping/>
-  </p:clrMapOvr>
-</p:notes>
-</file>
-
-<file path=ppt/notesSlides/notesSlide16.xml><?xml version="1.0" encoding="utf-8"?>
-<p:notes xmlns:a="http://schemas.openxmlformats.org/drawingml/2006/main" xmlns:r="http://schemas.openxmlformats.org/officeDocument/2006/relationships" xmlns:p="http://schemas.openxmlformats.org/presentationml/2006/main">
-  <p:cSld>
-    <p:spTree>
-      <p:nvGrpSpPr>
-        <p:cNvPr id="1" name=""/>
-        <p:cNvGrpSpPr/>
-        <p:nvPr/>
-      </p:nvGrpSpPr>
-      <p:grpSpPr>
-        <a:xfrm>
-          <a:off x="0" y="0"/>
-          <a:ext cx="0" cy="0"/>
-          <a:chOff x="0" y="0"/>
-          <a:chExt cx="0" cy="0"/>
-        </a:xfrm>
-      </p:grpSpPr>
-      <p:sp>
-        <p:nvSpPr>
-          <p:cNvPr id="2" name="Slide Image Placeholder 1"/>
-          <p:cNvSpPr>
-            <a:spLocks noGrp="1" noRot="1" noChangeAspect="1"/>
-          </p:cNvSpPr>
-          <p:nvPr>
-            <p:ph type="sldImg"/>
-          </p:nvPr>
-        </p:nvSpPr>
-        <p:spPr/>
-      </p:sp>
-      <p:sp>
-        <p:nvSpPr>
-          <p:cNvPr id="3" name="Notes Placeholder 2"/>
-          <p:cNvSpPr>
-            <a:spLocks noGrp="1"/>
-          </p:cNvSpPr>
-          <p:nvPr>
-            <p:ph type="body" idx="1"/>
-          </p:nvPr>
-        </p:nvSpPr>
-        <p:spPr/>
-        <p:txBody>
-          <a:bodyPr/>
-          <a:lstStyle/>
-          <a:p>
-            <a:r>
-              <a:rPr lang="en-US" dirty="0"/>
-              <a:t>Notas: Transição para a demonstração de 20 min. Sequência: parede com Albedo da Semana 6 -&gt; Noise → Bump → Normal (calibrar Strength) -&gt; segundo Noise → ColorRamp → Roughness (afastar marcadores) -&gt; organizar em frames -&gt; demo rápida de SSS (subir a 0.1 e voltar a 0) -&gt; comparar antes/depois desabilitando os frames com M. Fechar com a mensagem: o asset é idêntico geometricamente; o que mudou foi a informação que chegou ao cálculo de luz.
+              <a:t>Notas: Transição para a demonstração de 20 min. Sequência: parede com Albedo da Semana 6 -&gt; Noise → Bump → Normal (calibrar Strength) -&gt; segundo Noise → ColorRamp → Roughness (afastar marcadores) -&gt; organizar em frames -&gt; comparar antes/depois desabilitando os frames com M. Não demonstrar SSS — ele fica para a Semana 8, junto ao sistema de camadas do 3D Coat. Fechar com a mensagem: o asset é idêntico geometricamente; o que mudou foi a informação que chegou ao cálculo de luz.
 [!FIGURA]
 Objetivo didático: dar à turma um alvo visual do resultado esperado e antecipar o layout de tela da demonstração.
 Arquivo sugerido: assets/demo_material_completo.webp
@@ -1166,7 +1077,7 @@
           <a:p>
             <a:fld id="{F7021451-1387-4CA6-816F-3879F97B5CBC}" type="slidenum">
               <a:rPr lang="en-US"/>
-              <a:t>16</a:t>
+              <a:t>15</a:t>
             </a:fld>
             <a:endParaRPr lang="en-US"/>
           </a:p>
@@ -1231,7 +1142,7 @@
           <a:p>
             <a:r>
               <a:rPr lang="en-US" dirty="0"/>
-              <a:t>Notas: Ler rápido. Cada objetivo retorna ao longo da aula. Não antecipar 3D Coat (Semana 8) nem bake (Semana 11) — hoje tudo acontece com nós procedurais no Blender. O SSS entra apenas para completar o vocabulário do Principled BSDF.</a:t>
+              <a:t>Notas: Ler rápido. Cada objetivo retorna ao longo da aula. Não antecipar 3D Coat (Semana 8) nem bake (Semana 11) — hoje tudo acontece com nós procedurais no Blender. SSS não é tratado hoje — fica para a Semana 8.</a:t>
             </a:r>
             <a:endParaRPr lang="en-US" dirty="0"/>
           </a:p>
@@ -2443,45 +2354,6 @@
 <file path=ppt/slides/slide15.xml><?xml version="1.0" encoding="utf-8"?>
 <p:sld xmlns:a="http://schemas.openxmlformats.org/drawingml/2006/main" xmlns:r="http://schemas.openxmlformats.org/officeDocument/2006/relationships" xmlns:p="http://schemas.openxmlformats.org/presentationml/2006/main">
   <p:cSld name="Slide 15">
-    <p:bg>
-      <p:bgPr>
-        <a:blipFill dpi="0" rotWithShape="1">
-          <a:blip r:embed="rId1">
-            <a:lum/>
-          </a:blip>
-          <a:srcRect/>
-          <a:stretch>
-            <a:fillRect/>
-          </a:stretch>
-        </a:blipFill>
-        <a:effectLst/>
-      </p:bgPr>
-    </p:bg>
-    <p:spTree>
-      <p:nvGrpSpPr>
-        <p:cNvPr id="1" name=""/>
-        <p:cNvGrpSpPr/>
-        <p:nvPr/>
-      </p:nvGrpSpPr>
-      <p:grpSpPr>
-        <a:xfrm>
-          <a:off x="0" y="0"/>
-          <a:ext cx="0" cy="0"/>
-          <a:chOff x="0" y="0"/>
-          <a:chExt cx="0" cy="0"/>
-        </a:xfrm>
-      </p:grpSpPr>
-    </p:spTree>
-  </p:cSld>
-  <p:clrMapOvr>
-    <a:masterClrMapping/>
-  </p:clrMapOvr>
-</p:sld>
-</file>
-
-<file path=ppt/slides/slide16.xml><?xml version="1.0" encoding="utf-8"?>
-<p:sld xmlns:a="http://schemas.openxmlformats.org/drawingml/2006/main" xmlns:r="http://schemas.openxmlformats.org/officeDocument/2006/relationships" xmlns:p="http://schemas.openxmlformats.org/presentationml/2006/main">
-  <p:cSld name="Slide 16">
     <p:bg>
       <p:bgPr>
         <a:blipFill dpi="0" rotWithShape="1">

--- a/Slides/Semana 7/semana_7_slides.pptx
+++ b/Slides/Semana 7/semana_7_slides.pptx
@@ -20,9 +20,10 @@
     <p:sldId id="268" r:id="rId14"/>
     <p:sldId id="269" r:id="rId15"/>
     <p:sldId id="270" r:id="rId16"/>
+    <p:sldId id="271" r:id="rId17"/>
   </p:sldIdLst>
   <p:notesMasterIdLst>
-    <p:notesMasterId r:id="rId17"/>
+    <p:notesMasterId r:id="rId18"/>
   </p:notesMasterIdLst>
   <p:sldSz cx="12192000" cy="6858000"/>
   <p:notesSz cx="6858000" cy="12192000"/>
@@ -873,7 +874,7 @@
           <a:p>
             <a:r>
               <a:rPr lang="en-US" dirty="0"/>
-              <a:t>Notas: Amarrar a mini aula. Cada item retorna na demonstração e no estúdio. Não reler tudo — apontar a conexão com a demo. Lembrar: hoje é crítica INFORMAL; o foco é ler profundidade e coerência do material no trabalho dos colegas. Na Semana 8 (CF FORMAL) o mesmo material vem no 3D Coat, e é lá que o Subsurface Scattering aparece como canal do sistema de camadas.</a:t>
+              <a:t>Notas: Contextualizar o valor profissional. Geração procedural de texturas é competência central em produção real (Substance Designer é padrão de mercado) — mesmo quando o fluxo desta disciplina prioriza pintura manual no 3D Coat, é importante que o estudante saiba que essa outra via existe e é dominante na indústria. Amarra à Apostila, Parte IV, Cap. 13, que trata o tema com profundidade que a mini-aula desta semana só introduz.</a:t>
             </a:r>
             <a:endParaRPr lang="en-US" dirty="0"/>
           </a:p>
@@ -961,7 +962,7 @@
           <a:p>
             <a:r>
               <a:rPr lang="en-US" dirty="0"/>
-              <a:t>Notas: Consigna do estúdio. Dois blocos: quem falta terminar o Albedo do Asset 02 fecha isso primeiro (Bloco A, ~15 min); toda a turma adiciona Normal e Roughness (Bloco B). Nomenclatura: [Nome]_Asset01_PBR_S07.blend. Capturar screenshot do node tree + render comparativo antes/depois do Normal Map. Organizar em frames (Ctrl+J) é equivalente a organizar camadas no Krita.</a:t>
+              <a:t>Notas: Amarrar a mini aula. Cada item retorna na demonstração e no estúdio. Não reler tudo — apontar a conexão com a demo. Lembrar: hoje é crítica INFORMAL; o foco é ler profundidade e coerência do material no trabalho dos colegas. Na Semana 8 (CF FORMAL) o mesmo material vem no 3D Coat, e é lá que o Subsurface Scattering aparece como canal do sistema de camadas.</a:t>
             </a:r>
             <a:endParaRPr lang="en-US" dirty="0"/>
           </a:p>
@@ -1004,6 +1005,94 @@
 </file>
 
 <file path=ppt/notesSlides/notesSlide15.xml><?xml version="1.0" encoding="utf-8"?>
+<p:notes xmlns:a="http://schemas.openxmlformats.org/drawingml/2006/main" xmlns:r="http://schemas.openxmlformats.org/officeDocument/2006/relationships" xmlns:p="http://schemas.openxmlformats.org/presentationml/2006/main">
+  <p:cSld>
+    <p:spTree>
+      <p:nvGrpSpPr>
+        <p:cNvPr id="1" name=""/>
+        <p:cNvGrpSpPr/>
+        <p:nvPr/>
+      </p:nvGrpSpPr>
+      <p:grpSpPr>
+        <a:xfrm>
+          <a:off x="0" y="0"/>
+          <a:ext cx="0" cy="0"/>
+          <a:chOff x="0" y="0"/>
+          <a:chExt cx="0" cy="0"/>
+        </a:xfrm>
+      </p:grpSpPr>
+      <p:sp>
+        <p:nvSpPr>
+          <p:cNvPr id="2" name="Slide Image Placeholder 1"/>
+          <p:cNvSpPr>
+            <a:spLocks noGrp="1" noRot="1" noChangeAspect="1"/>
+          </p:cNvSpPr>
+          <p:nvPr>
+            <p:ph type="sldImg"/>
+          </p:nvPr>
+        </p:nvSpPr>
+        <p:spPr/>
+      </p:sp>
+      <p:sp>
+        <p:nvSpPr>
+          <p:cNvPr id="3" name="Notes Placeholder 2"/>
+          <p:cNvSpPr>
+            <a:spLocks noGrp="1"/>
+          </p:cNvSpPr>
+          <p:nvPr>
+            <p:ph type="body" idx="1"/>
+          </p:nvPr>
+        </p:nvSpPr>
+        <p:spPr/>
+        <p:txBody>
+          <a:bodyPr/>
+          <a:lstStyle/>
+          <a:p>
+            <a:r>
+              <a:rPr lang="en-US" dirty="0"/>
+              <a:t>Notas: Consigna do estúdio. Dois blocos: quem falta terminar o Albedo do Asset 02 fecha isso primeiro (Bloco A, ~15 min); toda a turma adiciona Normal e Roughness (Bloco B). Nomenclatura: [Nome]_Asset01_PBR_S07.blend. Capturar screenshot do node tree + render comparativo antes/depois do Normal Map. Organizar em frames (Ctrl+J) é equivalente a organizar camadas no Krita.</a:t>
+            </a:r>
+            <a:endParaRPr lang="en-US" dirty="0"/>
+          </a:p>
+        </p:txBody>
+      </p:sp>
+      <p:sp>
+        <p:nvSpPr>
+          <p:cNvPr id="4" name="Slide Number Placeholder 3"/>
+          <p:cNvSpPr>
+            <a:spLocks noGrp="1"/>
+          </p:cNvSpPr>
+          <p:nvPr>
+            <p:ph type="sldNum" sz="quarter" idx="10"/>
+          </p:nvPr>
+        </p:nvSpPr>
+        <p:spPr/>
+        <p:txBody>
+          <a:bodyPr/>
+          <a:lstStyle/>
+          <a:p>
+            <a:fld id="{F7021451-1387-4CA6-816F-3879F97B5CBC}" type="slidenum">
+              <a:rPr lang="en-US"/>
+              <a:t>15</a:t>
+            </a:fld>
+            <a:endParaRPr lang="en-US"/>
+          </a:p>
+        </p:txBody>
+      </p:sp>
+    </p:spTree>
+    <p:extLst>
+      <p:ext uri="{BB962C8B-B14F-4D97-AF65-F5344CB8AC3E}">
+        <p14:creationId xmlns:p14="http://schemas.microsoft.com/office/powerpoint/2010/main" val="1024086991"/>
+      </p:ext>
+    </p:extLst>
+  </p:cSld>
+  <p:clrMapOvr>
+    <a:masterClrMapping/>
+  </p:clrMapOvr>
+</p:notes>
+</file>
+
+<file path=ppt/notesSlides/notesSlide16.xml><?xml version="1.0" encoding="utf-8"?>
 <p:notes xmlns:a="http://schemas.openxmlformats.org/drawingml/2006/main" xmlns:r="http://schemas.openxmlformats.org/officeDocument/2006/relationships" xmlns:p="http://schemas.openxmlformats.org/presentationml/2006/main">
   <p:cSld>
     <p:spTree>
@@ -1077,7 +1166,7 @@
           <a:p>
             <a:fld id="{F7021451-1387-4CA6-816F-3879F97B5CBC}" type="slidenum">
               <a:rPr lang="en-US"/>
-              <a:t>15</a:t>
+              <a:t>16</a:t>
             </a:fld>
             <a:endParaRPr lang="en-US"/>
           </a:p>
@@ -2354,6 +2443,45 @@
 <file path=ppt/slides/slide15.xml><?xml version="1.0" encoding="utf-8"?>
 <p:sld xmlns:a="http://schemas.openxmlformats.org/drawingml/2006/main" xmlns:r="http://schemas.openxmlformats.org/officeDocument/2006/relationships" xmlns:p="http://schemas.openxmlformats.org/presentationml/2006/main">
   <p:cSld name="Slide 15">
+    <p:bg>
+      <p:bgPr>
+        <a:blipFill dpi="0" rotWithShape="1">
+          <a:blip r:embed="rId1">
+            <a:lum/>
+          </a:blip>
+          <a:srcRect/>
+          <a:stretch>
+            <a:fillRect/>
+          </a:stretch>
+        </a:blipFill>
+        <a:effectLst/>
+      </p:bgPr>
+    </p:bg>
+    <p:spTree>
+      <p:nvGrpSpPr>
+        <p:cNvPr id="1" name=""/>
+        <p:cNvGrpSpPr/>
+        <p:nvPr/>
+      </p:nvGrpSpPr>
+      <p:grpSpPr>
+        <a:xfrm>
+          <a:off x="0" y="0"/>
+          <a:ext cx="0" cy="0"/>
+          <a:chOff x="0" y="0"/>
+          <a:chExt cx="0" cy="0"/>
+        </a:xfrm>
+      </p:grpSpPr>
+    </p:spTree>
+  </p:cSld>
+  <p:clrMapOvr>
+    <a:masterClrMapping/>
+  </p:clrMapOvr>
+</p:sld>
+</file>
+
+<file path=ppt/slides/slide16.xml><?xml version="1.0" encoding="utf-8"?>
+<p:sld xmlns:a="http://schemas.openxmlformats.org/drawingml/2006/main" xmlns:r="http://schemas.openxmlformats.org/officeDocument/2006/relationships" xmlns:p="http://schemas.openxmlformats.org/presentationml/2006/main">
+  <p:cSld name="Slide 16">
     <p:bg>
       <p:bgPr>
         <a:blipFill dpi="0" rotWithShape="1">
